--- a/Bases de Datos II/Clases/Clase 14 - Parcial 3/Presentacion.pptx
+++ b/Bases de Datos II/Clases/Clase 14 - Parcial 3/Presentacion.pptx
@@ -3665,7 +3665,7 @@
                 </a:solidFill>
                 <a:latin typeface="Calibri"/>
               </a:rPr>
-              <a:t> (presencial sincrono).</a:t>
+              <a:t> (virtual sincrono por Meet).</a:t>
             </a:r>
           </a:p>
           <a:p>

--- a/Bases de Datos II/Clases/Clase 14 - Parcial 3/Presentacion.pptx
+++ b/Bases de Datos II/Clases/Clase 14 - Parcial 3/Presentacion.pptx
@@ -8,6 +8,7 @@
     <p:sldId id="256" r:id="rId7"/>
     <p:sldId id="257" r:id="rId8"/>
     <p:sldId id="258" r:id="rId9"/>
+    <p:sldId id="259" r:id="rId10"/>
   </p:sldIdLst>
   <p:sldSz cx="12191695" cy="6858000" type="screen4x3"/>
   <p:notesSz cx="6858000" cy="9144000"/>
@@ -3427,7 +3428,7 @@
                 </a:solidFill>
                 <a:latin typeface="Calibri"/>
               </a:rPr>
-              <a:t>Solo evaluacion</a:t>
+              <a:t>Solo evaluación · sin tema ni taller</a:t>
             </a:r>
           </a:p>
         </p:txBody>
@@ -3502,7 +3503,7 @@
         <p:spPr>
           <a:xfrm>
             <a:off x="0" y="0"/>
-            <a:ext cx="12191695" cy="960120"/>
+            <a:ext cx="12191695" cy="1170432"/>
           </a:xfrm>
           <a:prstGeom prst="rect">
             <a:avLst/>
@@ -3544,7 +3545,7 @@
         </p:nvSpPr>
         <p:spPr>
           <a:xfrm>
-            <a:off x="0" y="960120"/>
+            <a:off x="0" y="1170432"/>
             <a:ext cx="12191695" cy="41148"/>
           </a:xfrm>
           <a:prstGeom prst="rect">
@@ -3588,7 +3589,7 @@
         <p:spPr>
           <a:xfrm>
             <a:off x="457200" y="164592"/>
-            <a:ext cx="11277295" cy="502920"/>
+            <a:ext cx="11277295" cy="384048"/>
           </a:xfrm>
           <a:prstGeom prst="rect">
             <a:avLst/>
@@ -3608,7 +3609,7 @@
                 </a:solidFill>
                 <a:latin typeface="Calibri"/>
               </a:rPr>
-              <a:t>Indicaciones</a:t>
+              <a:t>Qué se evalúa hoy</a:t>
             </a:r>
           </a:p>
         </p:txBody>
@@ -3621,8 +3622,51 @@
         </p:nvSpPr>
         <p:spPr>
           <a:xfrm>
-            <a:off x="457200" y="1170432"/>
-            <a:ext cx="11277295" cy="5230368"/>
+            <a:off x="457200" y="566928"/>
+            <a:ext cx="11277295" cy="411480"/>
+          </a:xfrm>
+          <a:prstGeom prst="rect">
+            <a:avLst/>
+          </a:prstGeom>
+          <a:noFill/>
+        </p:spPr>
+        <p:txBody>
+          <a:bodyPr wrap="square">
+            <a:spAutoFit/>
+          </a:bodyPr>
+          <a:lstStyle/>
+          <a:p>
+            <a:r>
+              <a:rPr sz="1400" b="1" i="0">
+                <a:solidFill>
+                  <a:srgbClr val="B8D8EE"/>
+                </a:solidFill>
+                <a:latin typeface="Calibri"/>
+              </a:rPr>
+              <a:t>Solo</a:t>
+            </a:r>
+            <a:r>
+              <a:rPr sz="1400" b="0" i="0">
+                <a:solidFill>
+                  <a:srgbClr val="B8D8EE"/>
+                </a:solidFill>
+                <a:latin typeface="Calibri"/>
+              </a:rPr>
+              <a:t> Clase 11 · Clase 12 · Clase 13 — fuera de esa lista no hay nada</a:t>
+            </a:r>
+          </a:p>
+        </p:txBody>
+      </p:sp>
+      <p:sp>
+        <p:nvSpPr>
+          <p:cNvPr id="6" name="TextBox 5"/>
+          <p:cNvSpPr txBox="1"/>
+          <p:nvPr/>
+        </p:nvSpPr>
+        <p:spPr>
+          <a:xfrm>
+            <a:off x="457200" y="1380744"/>
+            <a:ext cx="11277295" cy="5020056"/>
           </a:xfrm>
           <a:prstGeom prst="rect">
             <a:avLst/>
@@ -3647,7 +3691,7 @@
                 </a:solidFill>
                 <a:latin typeface="Calibri"/>
               </a:rPr>
-              <a:t>–   Hoy es </a:t>
+              <a:t>–   </a:t>
             </a:r>
             <a:r>
               <a:rPr sz="1600" b="1" i="0">
@@ -3656,7 +3700,7 @@
                 </a:solidFill>
                 <a:latin typeface="Calibri"/>
               </a:rPr>
-              <a:t>solo Parcial</a:t>
+              <a:t>A. Selección múltiple</a:t>
             </a:r>
             <a:r>
               <a:rPr sz="1600" b="0" i="0">
@@ -3665,7 +3709,7 @@
                 </a:solidFill>
                 <a:latin typeface="Calibri"/>
               </a:rPr>
-              <a:t> (virtual sincrono por Meet).</a:t>
+              <a:t> — 20 pts</a:t>
             </a:r>
           </a:p>
           <a:p>
@@ -3681,7 +3725,25 @@
                 </a:solidFill>
                 <a:latin typeface="Calibri"/>
               </a:rPr>
-              <a:t>–   No hay tema nuevo ni taller del PI en esta sesion.</a:t>
+              <a:t>–   </a:t>
+            </a:r>
+            <a:r>
+              <a:rPr sz="1600" b="1" i="0">
+                <a:solidFill>
+                  <a:srgbClr val="333333"/>
+                </a:solidFill>
+                <a:latin typeface="Calibri"/>
+              </a:rPr>
+              <a:t>B. Verdadero / Falso</a:t>
+            </a:r>
+            <a:r>
+              <a:rPr sz="1600" b="0" i="0">
+                <a:solidFill>
+                  <a:srgbClr val="333333"/>
+                </a:solidFill>
+                <a:latin typeface="Calibri"/>
+              </a:rPr>
+              <a:t> — 20 pts</a:t>
             </a:r>
           </a:p>
           <a:p>
@@ -3697,7 +3759,7 @@
                 </a:solidFill>
                 <a:latin typeface="Calibri"/>
               </a:rPr>
-              <a:t>–   Duracion sugerida: </a:t>
+              <a:t>–   </a:t>
             </a:r>
             <a:r>
               <a:rPr sz="1600" b="1" i="0">
@@ -3706,7 +3768,7 @@
                 </a:solidFill>
                 <a:latin typeface="Calibri"/>
               </a:rPr>
-              <a:t>90-100 min</a:t>
+              <a:t>C. Integración de aplicaciones</a:t>
             </a:r>
             <a:r>
               <a:rPr sz="1600" b="0" i="0">
@@ -3715,7 +3777,7 @@
                 </a:solidFill>
                 <a:latin typeface="Calibri"/>
               </a:rPr>
-              <a:t> dentro del bloque de 120.</a:t>
+              <a:t> — 25 pts</a:t>
             </a:r>
           </a:p>
           <a:p>
@@ -3731,14 +3793,66 @@
                 </a:solidFill>
                 <a:latin typeface="Calibri"/>
               </a:rPr>
-              <a:t>–   El avance del PI VetCare DB continua en la siguiente clase regular.</a:t>
-            </a:r>
-          </a:p>
-        </p:txBody>
-      </p:sp>
-      <p:sp>
-        <p:nvSpPr>
-          <p:cNvPr id="6" name="TextBox 5"/>
+              <a:t>–   </a:t>
+            </a:r>
+            <a:r>
+              <a:rPr sz="1600" b="1" i="0">
+                <a:solidFill>
+                  <a:srgbClr val="333333"/>
+                </a:solidFill>
+                <a:latin typeface="Calibri"/>
+              </a:rPr>
+              <a:t>D. Caso / preparación de sustentación BD</a:t>
+            </a:r>
+            <a:r>
+              <a:rPr sz="1600" b="0" i="0">
+                <a:solidFill>
+                  <a:srgbClr val="333333"/>
+                </a:solidFill>
+                <a:latin typeface="Calibri"/>
+              </a:rPr>
+              <a:t> — 35 pts</a:t>
+            </a:r>
+          </a:p>
+          <a:p>
+            <a:pPr>
+              <a:spcAft>
+                <a:spcPts val="800"/>
+              </a:spcAft>
+            </a:pPr>
+            <a:r>
+              <a:rPr sz="1600" b="0" i="0">
+                <a:solidFill>
+                  <a:srgbClr val="333333"/>
+                </a:solidFill>
+                <a:latin typeface="Calibri"/>
+              </a:rPr>
+              <a:t>–   Total </a:t>
+            </a:r>
+            <a:r>
+              <a:rPr sz="1600" b="1" i="0">
+                <a:solidFill>
+                  <a:srgbClr val="333333"/>
+                </a:solidFill>
+                <a:latin typeface="Calibri"/>
+              </a:rPr>
+              <a:t>100 puntos</a:t>
+            </a:r>
+            <a:r>
+              <a:rPr sz="1600" b="0" i="0">
+                <a:solidFill>
+                  <a:srgbClr val="333333"/>
+                </a:solidFill>
+                <a:latin typeface="Calibri"/>
+              </a:rPr>
+              <a:t> · nota = puntos / 20 · este parcial pesa 15% del Corte 3 (40%).</a:t>
+            </a:r>
+          </a:p>
+        </p:txBody>
+      </p:sp>
+      <p:sp>
+        <p:nvSpPr>
+          <p:cNvPr id="7" name="TextBox 6"/>
           <p:cNvSpPr txBox="1"/>
           <p:nvPr/>
         </p:nvSpPr>
@@ -3806,13 +3920,13 @@
         <p:spPr>
           <a:xfrm>
             <a:off x="0" y="0"/>
-            <a:ext cx="12191695" cy="164592"/>
+            <a:ext cx="12191695" cy="1170432"/>
           </a:xfrm>
           <a:prstGeom prst="rect">
             <a:avLst/>
           </a:prstGeom>
           <a:solidFill>
-            <a:srgbClr val="269CCB"/>
+            <a:srgbClr val="095292"/>
           </a:solidFill>
           <a:ln>
             <a:noFill/>
@@ -3840,6 +3954,414 @@
           </a:p>
         </p:txBody>
       </p:sp>
+      <p:sp>
+        <p:nvSpPr>
+          <p:cNvPr id="3" name="Rectangle 2"/>
+          <p:cNvSpPr/>
+          <p:nvPr/>
+        </p:nvSpPr>
+        <p:spPr>
+          <a:xfrm>
+            <a:off x="0" y="1170432"/>
+            <a:ext cx="12191695" cy="41148"/>
+          </a:xfrm>
+          <a:prstGeom prst="rect">
+            <a:avLst/>
+          </a:prstGeom>
+          <a:solidFill>
+            <a:srgbClr val="FFD000"/>
+          </a:solidFill>
+          <a:ln>
+            <a:noFill/>
+          </a:ln>
+        </p:spPr>
+        <p:style>
+          <a:lnRef idx="1">
+            <a:schemeClr val="accent1"/>
+          </a:lnRef>
+          <a:fillRef idx="3">
+            <a:schemeClr val="accent1"/>
+          </a:fillRef>
+          <a:effectRef idx="2">
+            <a:schemeClr val="accent1"/>
+          </a:effectRef>
+          <a:fontRef idx="minor">
+            <a:schemeClr val="lt1"/>
+          </a:fontRef>
+        </p:style>
+        <p:txBody>
+          <a:bodyPr rtlCol="0" anchor="ctr"/>
+          <a:lstStyle/>
+          <a:p>
+            <a:pPr algn="ctr"/>
+          </a:p>
+        </p:txBody>
+      </p:sp>
+      <p:sp>
+        <p:nvSpPr>
+          <p:cNvPr id="4" name="TextBox 3"/>
+          <p:cNvSpPr txBox="1"/>
+          <p:nvPr/>
+        </p:nvSpPr>
+        <p:spPr>
+          <a:xfrm>
+            <a:off x="457200" y="164592"/>
+            <a:ext cx="11277295" cy="384048"/>
+          </a:xfrm>
+          <a:prstGeom prst="rect">
+            <a:avLst/>
+          </a:prstGeom>
+          <a:noFill/>
+        </p:spPr>
+        <p:txBody>
+          <a:bodyPr wrap="square">
+            <a:spAutoFit/>
+          </a:bodyPr>
+          <a:lstStyle/>
+          <a:p>
+            <a:r>
+              <a:rPr sz="2600" b="1" i="0">
+                <a:solidFill>
+                  <a:srgbClr val="FFFFFF"/>
+                </a:solidFill>
+                <a:latin typeface="Calibri"/>
+              </a:rPr>
+              <a:t>Cómo se responde y cómo se entrega</a:t>
+            </a:r>
+          </a:p>
+        </p:txBody>
+      </p:sp>
+      <p:sp>
+        <p:nvSpPr>
+          <p:cNvPr id="5" name="TextBox 4"/>
+          <p:cNvSpPr txBox="1"/>
+          <p:nvPr/>
+        </p:nvSpPr>
+        <p:spPr>
+          <a:xfrm>
+            <a:off x="457200" y="566928"/>
+            <a:ext cx="11277295" cy="411480"/>
+          </a:xfrm>
+          <a:prstGeom prst="rect">
+            <a:avLst/>
+          </a:prstGeom>
+          <a:noFill/>
+        </p:spPr>
+        <p:txBody>
+          <a:bodyPr wrap="square">
+            <a:spAutoFit/>
+          </a:bodyPr>
+          <a:lstStyle/>
+          <a:p>
+            <a:r>
+              <a:rPr sz="1400" b="0" i="0">
+                <a:solidFill>
+                  <a:srgbClr val="B8D8EE"/>
+                </a:solidFill>
+                <a:latin typeface="Calibri"/>
+              </a:rPr>
+              <a:t>Tiempo previsto </a:t>
+            </a:r>
+            <a:r>
+              <a:rPr sz="1400" b="1" i="0">
+                <a:solidFill>
+                  <a:srgbClr val="B8D8EE"/>
+                </a:solidFill>
+                <a:latin typeface="Calibri"/>
+              </a:rPr>
+              <a:t>90–100 minutos</a:t>
+            </a:r>
+            <a:r>
+              <a:rPr sz="1400" b="0" i="0">
+                <a:solidFill>
+                  <a:srgbClr val="B8D8EE"/>
+                </a:solidFill>
+                <a:latin typeface="Calibri"/>
+              </a:rPr>
+              <a:t> dentro del bloque de 120</a:t>
+            </a:r>
+          </a:p>
+        </p:txBody>
+      </p:sp>
+      <p:sp>
+        <p:nvSpPr>
+          <p:cNvPr id="6" name="TextBox 5"/>
+          <p:cNvSpPr txBox="1"/>
+          <p:nvPr/>
+        </p:nvSpPr>
+        <p:spPr>
+          <a:xfrm>
+            <a:off x="457200" y="1380744"/>
+            <a:ext cx="11277295" cy="5020056"/>
+          </a:xfrm>
+          <a:prstGeom prst="rect">
+            <a:avLst/>
+          </a:prstGeom>
+          <a:noFill/>
+        </p:spPr>
+        <p:txBody>
+          <a:bodyPr wrap="square">
+            <a:spAutoFit/>
+          </a:bodyPr>
+          <a:lstStyle/>
+          <a:p>
+            <a:pPr>
+              <a:spcAft>
+                <a:spcPts val="800"/>
+              </a:spcAft>
+            </a:pPr>
+            <a:r>
+              <a:rPr sz="1600" b="0" i="0">
+                <a:solidFill>
+                  <a:srgbClr val="333333"/>
+                </a:solidFill>
+                <a:latin typeface="Calibri"/>
+              </a:rPr>
+              <a:t>–   El envío </a:t>
+            </a:r>
+            <a:r>
+              <a:rPr sz="1600" b="1" i="0">
+                <a:solidFill>
+                  <a:srgbClr val="333333"/>
+                </a:solidFill>
+                <a:latin typeface="Calibri"/>
+              </a:rPr>
+              <a:t>cierra en el minuto 110</a:t>
+            </a:r>
+            <a:r>
+              <a:rPr sz="1600" b="0" i="0">
+                <a:solidFill>
+                  <a:srgbClr val="333333"/>
+                </a:solidFill>
+                <a:latin typeface="Calibri"/>
+              </a:rPr>
+              <a:t>: lo que llegue después no se recibe.</a:t>
+            </a:r>
+          </a:p>
+          <a:p>
+            <a:pPr>
+              <a:spcAft>
+                <a:spcPts val="800"/>
+              </a:spcAft>
+            </a:pPr>
+            <a:r>
+              <a:rPr sz="1600" b="0" i="0">
+                <a:solidFill>
+                  <a:srgbClr val="333333"/>
+                </a:solidFill>
+                <a:latin typeface="Calibri"/>
+              </a:rPr>
+              <a:t>–   Canal de entrega: el que se anuncia ahora. Confirmo cada recibido por el chat.</a:t>
+            </a:r>
+          </a:p>
+          <a:p>
+            <a:pPr>
+              <a:spcAft>
+                <a:spcPts val="800"/>
+              </a:spcAft>
+            </a:pPr>
+            <a:r>
+              <a:rPr sz="1600" b="0" i="0">
+                <a:solidFill>
+                  <a:srgbClr val="333333"/>
+                </a:solidFill>
+                <a:latin typeface="Calibri"/>
+              </a:rPr>
+              <a:t>–   El SQL se escribe </a:t>
+            </a:r>
+            <a:r>
+              <a:rPr sz="1600" b="1" i="0">
+                <a:solidFill>
+                  <a:srgbClr val="333333"/>
+                </a:solidFill>
+                <a:latin typeface="Calibri"/>
+              </a:rPr>
+              <a:t>como texto</a:t>
+            </a:r>
+            <a:r>
+              <a:rPr sz="1600" b="0" i="0">
+                <a:solidFill>
+                  <a:srgbClr val="333333"/>
+                </a:solidFill>
+                <a:latin typeface="Calibri"/>
+              </a:rPr>
+              <a:t>: no se pide captura ni se abre ExamLab.</a:t>
+            </a:r>
+          </a:p>
+          <a:p>
+            <a:pPr>
+              <a:spcAft>
+                <a:spcPts val="800"/>
+              </a:spcAft>
+            </a:pPr>
+            <a:r>
+              <a:rPr sz="1600" b="0" i="0">
+                <a:solidFill>
+                  <a:srgbClr val="333333"/>
+                </a:solidFill>
+                <a:latin typeface="Calibri"/>
+              </a:rPr>
+              <a:t>–   Pregunta de </a:t>
+            </a:r>
+            <a:r>
+              <a:rPr sz="1600" b="1" i="0">
+                <a:solidFill>
+                  <a:srgbClr val="333333"/>
+                </a:solidFill>
+                <a:latin typeface="Calibri"/>
+              </a:rPr>
+              <a:t>forma</a:t>
+            </a:r>
+            <a:r>
+              <a:rPr sz="1600" b="0" i="0">
+                <a:solidFill>
+                  <a:srgbClr val="333333"/>
+                </a:solidFill>
+                <a:latin typeface="Calibri"/>
+              </a:rPr>
+              <a:t> sí (cuántas líneas, si pide tabla). De </a:t>
+            </a:r>
+            <a:r>
+              <a:rPr sz="1600" b="1" i="0">
+                <a:solidFill>
+                  <a:srgbClr val="333333"/>
+                </a:solidFill>
+                <a:latin typeface="Calibri"/>
+              </a:rPr>
+              <a:t>contenido</a:t>
+            </a:r>
+            <a:r>
+              <a:rPr sz="1600" b="0" i="0">
+                <a:solidFill>
+                  <a:srgbClr val="333333"/>
+                </a:solidFill>
+                <a:latin typeface="Calibri"/>
+              </a:rPr>
+              <a:t> no.</a:t>
+            </a:r>
+          </a:p>
+          <a:p>
+            <a:pPr>
+              <a:spcAft>
+                <a:spcPts val="800"/>
+              </a:spcAft>
+            </a:pPr>
+            <a:r>
+              <a:rPr sz="1600" b="0" i="0">
+                <a:solidFill>
+                  <a:srgbClr val="333333"/>
+                </a:solidFill>
+                <a:latin typeface="Calibri"/>
+              </a:rPr>
+              <a:t>–   Si se te cae el internet: sigue respondiendo y avisa por correo al volver.</a:t>
+            </a:r>
+          </a:p>
+        </p:txBody>
+      </p:sp>
+      <p:sp>
+        <p:nvSpPr>
+          <p:cNvPr id="7" name="TextBox 6"/>
+          <p:cNvSpPr txBox="1"/>
+          <p:nvPr/>
+        </p:nvSpPr>
+        <p:spPr>
+          <a:xfrm>
+            <a:off x="11185855" y="6473952"/>
+            <a:ext cx="640080" cy="274320"/>
+          </a:xfrm>
+          <a:prstGeom prst="rect">
+            <a:avLst/>
+          </a:prstGeom>
+          <a:noFill/>
+        </p:spPr>
+        <p:txBody>
+          <a:bodyPr wrap="square">
+            <a:spAutoFit/>
+          </a:bodyPr>
+          <a:lstStyle/>
+          <a:p>
+            <a:pPr algn="r"/>
+            <a:r>
+              <a:rPr sz="1100" b="0" i="0">
+                <a:solidFill>
+                  <a:srgbClr val="666666"/>
+                </a:solidFill>
+                <a:latin typeface="Calibri"/>
+              </a:rPr>
+              <a:t>3</a:t>
+            </a:r>
+          </a:p>
+        </p:txBody>
+      </p:sp>
+    </p:spTree>
+  </p:cSld>
+  <p:clrMapOvr>
+    <a:masterClrMapping/>
+  </p:clrMapOvr>
+</p:sld>
+</file>
+
+<file path=ppt/slides/slide4.xml><?xml version="1.0" encoding="utf-8"?>
+<p:sld xmlns:a="http://schemas.openxmlformats.org/drawingml/2006/main" xmlns:p="http://schemas.openxmlformats.org/presentationml/2006/main" xmlns:r="http://schemas.openxmlformats.org/officeDocument/2006/relationships">
+  <p:cSld>
+    <p:bg>
+      <p:bgPr>
+        <a:solidFill>
+          <a:srgbClr val="FFFFFF"/>
+        </a:solidFill>
+        <a:effectLst/>
+      </p:bgPr>
+    </p:bg>
+    <p:spTree>
+      <p:nvGrpSpPr>
+        <p:cNvPr id="1" name=""/>
+        <p:cNvGrpSpPr/>
+        <p:nvPr/>
+      </p:nvGrpSpPr>
+      <p:grpSpPr/>
+      <p:sp>
+        <p:nvSpPr>
+          <p:cNvPr id="2" name="Rectangle 1"/>
+          <p:cNvSpPr/>
+          <p:nvPr/>
+        </p:nvSpPr>
+        <p:spPr>
+          <a:xfrm>
+            <a:off x="0" y="0"/>
+            <a:ext cx="12191695" cy="164592"/>
+          </a:xfrm>
+          <a:prstGeom prst="rect">
+            <a:avLst/>
+          </a:prstGeom>
+          <a:solidFill>
+            <a:srgbClr val="269CCB"/>
+          </a:solidFill>
+          <a:ln>
+            <a:noFill/>
+          </a:ln>
+        </p:spPr>
+        <p:style>
+          <a:lnRef idx="1">
+            <a:schemeClr val="accent1"/>
+          </a:lnRef>
+          <a:fillRef idx="3">
+            <a:schemeClr val="accent1"/>
+          </a:fillRef>
+          <a:effectRef idx="2">
+            <a:schemeClr val="accent1"/>
+          </a:effectRef>
+          <a:fontRef idx="minor">
+            <a:schemeClr val="lt1"/>
+          </a:fontRef>
+        </p:style>
+        <p:txBody>
+          <a:bodyPr rtlCol="0" anchor="ctr"/>
+          <a:lstStyle/>
+          <a:p>
+            <a:pPr algn="ctr"/>
+          </a:p>
+        </p:txBody>
+      </p:sp>
       <p:pic>
         <p:nvPicPr>
           <p:cNvPr id="3" name="Picture 2" descr="logo_uniajc_color.png"/>
@@ -3931,7 +4453,7 @@
                 </a:solidFill>
                 <a:latin typeface="Calibri"/>
               </a:rPr>
-              <a:t>Enfocados en la evaluacion del corte</a:t>
+              <a:t>Hoy solo se evalúa el corte</a:t>
             </a:r>
           </a:p>
           <a:p>
@@ -3947,7 +4469,7 @@
                 </a:solidFill>
                 <a:latin typeface="Calibri"/>
               </a:rPr>
-              <a:t>El PI VetCare DB continua la proxima clase</a:t>
+              <a:t>Clase 15: sustentación del PI VetCare DB, no hay tema nuevo</a:t>
             </a:r>
           </a:p>
         </p:txBody>
@@ -3982,7 +4504,7 @@
                 </a:solidFill>
                 <a:latin typeface="Calibri"/>
               </a:rPr>
-              <a:t>Solo evaluacion</a:t>
+              <a:t>Solo evaluación</a:t>
             </a:r>
           </a:p>
         </p:txBody>

--- a/Bases de Datos II/Clases/Clase 14 - Parcial 3/Presentacion.pptx
+++ b/Bases de Datos II/Clases/Clase 14 - Parcial 3/Presentacion.pptx
@@ -3685,7 +3685,7 @@
               </a:spcAft>
             </a:pPr>
             <a:r>
-              <a:rPr sz="1600" b="0" i="0">
+              <a:rPr sz="2000" b="0" i="0">
                 <a:solidFill>
                   <a:srgbClr val="333333"/>
                 </a:solidFill>
@@ -3694,7 +3694,7 @@
               <a:t>–   </a:t>
             </a:r>
             <a:r>
-              <a:rPr sz="1600" b="1" i="0">
+              <a:rPr sz="2000" b="1" i="0">
                 <a:solidFill>
                   <a:srgbClr val="333333"/>
                 </a:solidFill>
@@ -3703,7 +3703,7 @@
               <a:t>A. Selección múltiple</a:t>
             </a:r>
             <a:r>
-              <a:rPr sz="1600" b="0" i="0">
+              <a:rPr sz="2000" b="0" i="0">
                 <a:solidFill>
                   <a:srgbClr val="333333"/>
                 </a:solidFill>
@@ -3719,7 +3719,7 @@
               </a:spcAft>
             </a:pPr>
             <a:r>
-              <a:rPr sz="1600" b="0" i="0">
+              <a:rPr sz="2000" b="0" i="0">
                 <a:solidFill>
                   <a:srgbClr val="333333"/>
                 </a:solidFill>
@@ -3728,7 +3728,7 @@
               <a:t>–   </a:t>
             </a:r>
             <a:r>
-              <a:rPr sz="1600" b="1" i="0">
+              <a:rPr sz="2000" b="1" i="0">
                 <a:solidFill>
                   <a:srgbClr val="333333"/>
                 </a:solidFill>
@@ -3737,7 +3737,7 @@
               <a:t>B. Verdadero / Falso</a:t>
             </a:r>
             <a:r>
-              <a:rPr sz="1600" b="0" i="0">
+              <a:rPr sz="2000" b="0" i="0">
                 <a:solidFill>
                   <a:srgbClr val="333333"/>
                 </a:solidFill>
@@ -3753,7 +3753,7 @@
               </a:spcAft>
             </a:pPr>
             <a:r>
-              <a:rPr sz="1600" b="0" i="0">
+              <a:rPr sz="2000" b="0" i="0">
                 <a:solidFill>
                   <a:srgbClr val="333333"/>
                 </a:solidFill>
@@ -3762,7 +3762,7 @@
               <a:t>–   </a:t>
             </a:r>
             <a:r>
-              <a:rPr sz="1600" b="1" i="0">
+              <a:rPr sz="2000" b="1" i="0">
                 <a:solidFill>
                   <a:srgbClr val="333333"/>
                 </a:solidFill>
@@ -3771,7 +3771,7 @@
               <a:t>C. Integración de aplicaciones</a:t>
             </a:r>
             <a:r>
-              <a:rPr sz="1600" b="0" i="0">
+              <a:rPr sz="2000" b="0" i="0">
                 <a:solidFill>
                   <a:srgbClr val="333333"/>
                 </a:solidFill>
@@ -3787,7 +3787,7 @@
               </a:spcAft>
             </a:pPr>
             <a:r>
-              <a:rPr sz="1600" b="0" i="0">
+              <a:rPr sz="2000" b="0" i="0">
                 <a:solidFill>
                   <a:srgbClr val="333333"/>
                 </a:solidFill>
@@ -3796,7 +3796,7 @@
               <a:t>–   </a:t>
             </a:r>
             <a:r>
-              <a:rPr sz="1600" b="1" i="0">
+              <a:rPr sz="2000" b="1" i="0">
                 <a:solidFill>
                   <a:srgbClr val="333333"/>
                 </a:solidFill>
@@ -3805,7 +3805,7 @@
               <a:t>D. Caso / preparación de sustentación BD</a:t>
             </a:r>
             <a:r>
-              <a:rPr sz="1600" b="0" i="0">
+              <a:rPr sz="2000" b="0" i="0">
                 <a:solidFill>
                   <a:srgbClr val="333333"/>
                 </a:solidFill>
@@ -3821,7 +3821,7 @@
               </a:spcAft>
             </a:pPr>
             <a:r>
-              <a:rPr sz="1600" b="0" i="0">
+              <a:rPr sz="2000" b="0" i="0">
                 <a:solidFill>
                   <a:srgbClr val="333333"/>
                 </a:solidFill>
@@ -3830,7 +3830,7 @@
               <a:t>–   Total </a:t>
             </a:r>
             <a:r>
-              <a:rPr sz="1600" b="1" i="0">
+              <a:rPr sz="2000" b="1" i="0">
                 <a:solidFill>
                   <a:srgbClr val="333333"/>
                 </a:solidFill>
@@ -3839,7 +3839,7 @@
               <a:t>100 puntos</a:t>
             </a:r>
             <a:r>
-              <a:rPr sz="1600" b="0" i="0">
+              <a:rPr sz="2000" b="0" i="0">
                 <a:solidFill>
                   <a:srgbClr val="333333"/>
                 </a:solidFill>
@@ -4111,7 +4111,7 @@
               </a:spcAft>
             </a:pPr>
             <a:r>
-              <a:rPr sz="1600" b="0" i="0">
+              <a:rPr sz="2000" b="0" i="0">
                 <a:solidFill>
                   <a:srgbClr val="333333"/>
                 </a:solidFill>
@@ -4120,7 +4120,7 @@
               <a:t>–   El envío </a:t>
             </a:r>
             <a:r>
-              <a:rPr sz="1600" b="1" i="0">
+              <a:rPr sz="2000" b="1" i="0">
                 <a:solidFill>
                   <a:srgbClr val="333333"/>
                 </a:solidFill>
@@ -4129,7 +4129,7 @@
               <a:t>cierra en el minuto 110</a:t>
             </a:r>
             <a:r>
-              <a:rPr sz="1600" b="0" i="0">
+              <a:rPr sz="2000" b="0" i="0">
                 <a:solidFill>
                   <a:srgbClr val="333333"/>
                 </a:solidFill>
@@ -4145,7 +4145,7 @@
               </a:spcAft>
             </a:pPr>
             <a:r>
-              <a:rPr sz="1600" b="0" i="0">
+              <a:rPr sz="2000" b="0" i="0">
                 <a:solidFill>
                   <a:srgbClr val="333333"/>
                 </a:solidFill>
@@ -4161,7 +4161,7 @@
               </a:spcAft>
             </a:pPr>
             <a:r>
-              <a:rPr sz="1600" b="0" i="0">
+              <a:rPr sz="2000" b="0" i="0">
                 <a:solidFill>
                   <a:srgbClr val="333333"/>
                 </a:solidFill>
@@ -4170,7 +4170,7 @@
               <a:t>–   El SQL se escribe </a:t>
             </a:r>
             <a:r>
-              <a:rPr sz="1600" b="1" i="0">
+              <a:rPr sz="2000" b="1" i="0">
                 <a:solidFill>
                   <a:srgbClr val="333333"/>
                 </a:solidFill>
@@ -4179,7 +4179,7 @@
               <a:t>como texto</a:t>
             </a:r>
             <a:r>
-              <a:rPr sz="1600" b="0" i="0">
+              <a:rPr sz="2000" b="0" i="0">
                 <a:solidFill>
                   <a:srgbClr val="333333"/>
                 </a:solidFill>
@@ -4195,7 +4195,7 @@
               </a:spcAft>
             </a:pPr>
             <a:r>
-              <a:rPr sz="1600" b="0" i="0">
+              <a:rPr sz="2000" b="0" i="0">
                 <a:solidFill>
                   <a:srgbClr val="333333"/>
                 </a:solidFill>
@@ -4204,7 +4204,7 @@
               <a:t>–   Pregunta de </a:t>
             </a:r>
             <a:r>
-              <a:rPr sz="1600" b="1" i="0">
+              <a:rPr sz="2000" b="1" i="0">
                 <a:solidFill>
                   <a:srgbClr val="333333"/>
                 </a:solidFill>
@@ -4213,7 +4213,7 @@
               <a:t>forma</a:t>
             </a:r>
             <a:r>
-              <a:rPr sz="1600" b="0" i="0">
+              <a:rPr sz="2000" b="0" i="0">
                 <a:solidFill>
                   <a:srgbClr val="333333"/>
                 </a:solidFill>
@@ -4222,7 +4222,7 @@
               <a:t> sí (cuántas líneas, si pide tabla). De </a:t>
             </a:r>
             <a:r>
-              <a:rPr sz="1600" b="1" i="0">
+              <a:rPr sz="2000" b="1" i="0">
                 <a:solidFill>
                   <a:srgbClr val="333333"/>
                 </a:solidFill>
@@ -4231,7 +4231,7 @@
               <a:t>contenido</a:t>
             </a:r>
             <a:r>
-              <a:rPr sz="1600" b="0" i="0">
+              <a:rPr sz="2000" b="0" i="0">
                 <a:solidFill>
                   <a:srgbClr val="333333"/>
                 </a:solidFill>
@@ -4247,7 +4247,7 @@
               </a:spcAft>
             </a:pPr>
             <a:r>
-              <a:rPr sz="1600" b="0" i="0">
+              <a:rPr sz="2000" b="0" i="0">
                 <a:solidFill>
                   <a:srgbClr val="333333"/>
                 </a:solidFill>

--- a/Bases de Datos II/Clases/Clase 14 - Parcial 3/Presentacion.pptx
+++ b/Bases de Datos II/Clases/Clase 14 - Parcial 3/Presentacion.pptx
@@ -4185,7 +4185,7 @@
                 </a:solidFill>
                 <a:latin typeface="Calibri"/>
               </a:rPr>
-              <a:t>: no se pide captura ni se abre ExamLab.</a:t>
+              <a:t>: no se pide captura ni se abre la plataforma del curso.</a:t>
             </a:r>
           </a:p>
           <a:p>
